--- a/campagne-janv-2027/plan-com-evenement_v1.pptx
+++ b/campagne-janv-2027/plan-com-evenement_v1.pptx
@@ -3881,7 +3881,7 @@
                           </a:solidFill>
                           <a:latin typeface="Nunito"/>
                         </a:rPr>
-                        <a:t>Fatima</a:t>
+                        <a:t>Équipe marketing</a:t>
                       </a:r>
                     </a:p>
                   </a:txBody>
